--- a/12th Midwest Workshop poster.pptx
+++ b/12th Midwest Workshop poster.pptx
@@ -97,12 +97,12 @@
   <pc:docChgLst>
     <pc:chgData name="Somtochukwu Marcellinu Oguchienti" userId="81716b36-7a6c-496b-bae8-07ded95f8392" providerId="ADAL" clId="{64BD3F16-0C53-4166-96D3-AB801F1728AB}"/>
     <pc:docChg chg="undo custSel modSld modMainMaster">
-      <pc:chgData name="Somtochukwu Marcellinu Oguchienti" userId="81716b36-7a6c-496b-bae8-07ded95f8392" providerId="ADAL" clId="{64BD3F16-0C53-4166-96D3-AB801F1728AB}" dt="2026-04-22T20:53:56.552" v="1487" actId="478"/>
+      <pc:chgData name="Somtochukwu Marcellinu Oguchienti" userId="81716b36-7a6c-496b-bae8-07ded95f8392" providerId="ADAL" clId="{64BD3F16-0C53-4166-96D3-AB801F1728AB}" dt="2026-04-23T17:41:49.012" v="1493" actId="1076"/>
       <pc:docMkLst>
         <pc:docMk/>
       </pc:docMkLst>
       <pc:sldChg chg="addSp delSp modSp mod">
-        <pc:chgData name="Somtochukwu Marcellinu Oguchienti" userId="81716b36-7a6c-496b-bae8-07ded95f8392" providerId="ADAL" clId="{64BD3F16-0C53-4166-96D3-AB801F1728AB}" dt="2026-04-22T20:53:56.552" v="1487" actId="478"/>
+        <pc:chgData name="Somtochukwu Marcellinu Oguchienti" userId="81716b36-7a6c-496b-bae8-07ded95f8392" providerId="ADAL" clId="{64BD3F16-0C53-4166-96D3-AB801F1728AB}" dt="2026-04-23T17:41:49.012" v="1493" actId="1076"/>
         <pc:sldMkLst>
           <pc:docMk/>
           <pc:sldMk cId="353508148" sldId="257"/>
@@ -243,6 +243,14 @@
             <ac:picMk id="3" creationId="{6EB19772-6520-4471-8012-A049BE61E7F4}"/>
           </ac:picMkLst>
         </pc:picChg>
+        <pc:picChg chg="add mod">
+          <ac:chgData name="Somtochukwu Marcellinu Oguchienti" userId="81716b36-7a6c-496b-bae8-07ded95f8392" providerId="ADAL" clId="{64BD3F16-0C53-4166-96D3-AB801F1728AB}" dt="2026-04-23T17:41:49.012" v="1493" actId="1076"/>
+          <ac:picMkLst>
+            <pc:docMk/>
+            <pc:sldMk cId="353508148" sldId="257"/>
+            <ac:picMk id="3" creationId="{E009C615-5800-469A-B503-4A802122AC02}"/>
+          </ac:picMkLst>
+        </pc:picChg>
         <pc:picChg chg="add del mod">
           <ac:chgData name="Somtochukwu Marcellinu Oguchienti" userId="81716b36-7a6c-496b-bae8-07ded95f8392" providerId="ADAL" clId="{64BD3F16-0C53-4166-96D3-AB801F1728AB}" dt="2026-04-21T20:17:41.571" v="294" actId="478"/>
           <ac:picMkLst>
@@ -339,6 +347,14 @@
             <ac:picMk id="51" creationId="{C1C54667-C55B-4694-AB86-2895B722B9EE}"/>
           </ac:picMkLst>
         </pc:picChg>
+        <pc:picChg chg="del">
+          <ac:chgData name="Somtochukwu Marcellinu Oguchienti" userId="81716b36-7a6c-496b-bae8-07ded95f8392" providerId="ADAL" clId="{64BD3F16-0C53-4166-96D3-AB801F1728AB}" dt="2026-04-23T17:41:38.925" v="1489" actId="478"/>
+          <ac:picMkLst>
+            <pc:docMk/>
+            <pc:sldMk cId="353508148" sldId="257"/>
+            <ac:picMk id="53" creationId="{D96B1EF2-8458-45B0-AD9C-2E2A7C39F10E}"/>
+          </ac:picMkLst>
+        </pc:picChg>
         <pc:picChg chg="del mod">
           <ac:chgData name="Somtochukwu Marcellinu Oguchienti" userId="81716b36-7a6c-496b-bae8-07ded95f8392" providerId="ADAL" clId="{64BD3F16-0C53-4166-96D3-AB801F1728AB}" dt="2026-04-20T21:31:14.685" v="94" actId="478"/>
           <ac:picMkLst>
@@ -493,7 +509,7 @@
           </a:lstStyle>
           <a:p>
             <a:fld id="{723CB976-3A0D-2F40-A366-5F74A853346A}" type="datetimeFigureOut">
-              <a:t>4/21/2026</a:t>
+              <a:t>4/23/2026</a:t>
             </a:fld>
             <a:endParaRPr lang="en-US"/>
           </a:p>
@@ -669,7 +685,7 @@
           <a:p>
             <a:fld id="{7128EC3D-BC13-414D-9962-48C85B9AA878}" type="datetimeFigureOut">
               <a:rPr lang="en-US" smtClean="0"/>
-              <a:t>4/21/2026</a:t>
+              <a:t>4/23/2026</a:t>
             </a:fld>
             <a:endParaRPr lang="en-US"/>
           </a:p>
@@ -1089,7 +1105,7 @@
           <a:p>
             <a:fld id="{1D8BD707-D9CF-40AE-B4C6-C98DA3205C09}" type="datetimeFigureOut">
               <a:rPr lang="en-US"/>
-              <a:t>4/21/2026</a:t>
+              <a:t>4/23/2026</a:t>
             </a:fld>
             <a:endParaRPr lang="en-US"/>
           </a:p>
@@ -1345,7 +1361,7 @@
           <a:p>
             <a:fld id="{1D8BD707-D9CF-40AE-B4C6-C98DA3205C09}" type="datetimeFigureOut">
               <a:rPr lang="en-US"/>
-              <a:t>4/21/2026</a:t>
+              <a:t>4/23/2026</a:t>
             </a:fld>
             <a:endParaRPr lang="en-US"/>
           </a:p>
@@ -1684,7 +1700,7 @@
           <a:p>
             <a:fld id="{1D8BD707-D9CF-40AE-B4C6-C98DA3205C09}" type="datetimeFigureOut">
               <a:rPr lang="en-US"/>
-              <a:t>4/21/2026</a:t>
+              <a:t>4/23/2026</a:t>
             </a:fld>
             <a:endParaRPr lang="en-US"/>
           </a:p>
@@ -1842,7 +1858,7 @@
           <a:p>
             <a:fld id="{1D8BD707-D9CF-40AE-B4C6-C98DA3205C09}" type="datetimeFigureOut">
               <a:rPr lang="en-US"/>
-              <a:t>4/21/2026</a:t>
+              <a:t>4/23/2026</a:t>
             </a:fld>
             <a:endParaRPr lang="en-US"/>
           </a:p>
@@ -1962,7 +1978,7 @@
           <a:p>
             <a:fld id="{1D8BD707-D9CF-40AE-B4C6-C98DA3205C09}" type="datetimeFigureOut">
               <a:rPr lang="en-US"/>
-              <a:t>4/21/2026</a:t>
+              <a:t>4/23/2026</a:t>
             </a:fld>
             <a:endParaRPr lang="en-US"/>
           </a:p>
@@ -2386,7 +2402,7 @@
           <a:p>
             <a:fld id="{1D8BD707-D9CF-40AE-B4C6-C98DA3205C09}" type="datetimeFigureOut">
               <a:rPr lang="en-US"/>
-              <a:t>4/21/2026</a:t>
+              <a:t>4/23/2026</a:t>
             </a:fld>
             <a:endParaRPr lang="en-US"/>
           </a:p>
@@ -3628,42 +3644,6 @@
           </a:p>
         </p:txBody>
       </p:sp>
-      <p:pic>
-        <p:nvPicPr>
-          <p:cNvPr id="53" name="Picture 52">
-            <a:extLst>
-              <a:ext uri="{FF2B5EF4-FFF2-40B4-BE49-F238E27FC236}">
-                <a16:creationId xmlns:a16="http://schemas.microsoft.com/office/drawing/2014/main" id="{D96B1EF2-8458-45B0-AD9C-2E2A7C39F10E}"/>
-              </a:ext>
-            </a:extLst>
-          </p:cNvPr>
-          <p:cNvPicPr>
-            <a:picLocks noChangeAspect="1"/>
-          </p:cNvPicPr>
-          <p:nvPr/>
-        </p:nvPicPr>
-        <p:blipFill>
-          <a:blip r:embed="rId5">
-            <a:extLst>
-              <a:ext uri="{28A0092B-C50C-407E-A947-70E740481C1C}">
-                <a14:useLocalDpi xmlns:a14="http://schemas.microsoft.com/office/drawing/2010/main" val="0"/>
-              </a:ext>
-            </a:extLst>
-          </a:blip>
-          <a:stretch>
-            <a:fillRect/>
-          </a:stretch>
-        </p:blipFill>
-        <p:spPr>
-          <a:xfrm>
-            <a:off x="399949" y="16859038"/>
-            <a:ext cx="7024945" cy="7068488"/>
-          </a:xfrm>
-          <a:prstGeom prst="rect">
-            <a:avLst/>
-          </a:prstGeom>
-        </p:spPr>
-      </p:pic>
       <p:sp>
         <p:nvSpPr>
           <p:cNvPr id="54" name="Poster title">
@@ -3811,6 +3791,42 @@
           <p:nvPr/>
         </p:nvPicPr>
         <p:blipFill>
+          <a:blip r:embed="rId5">
+            <a:extLst>
+              <a:ext uri="{28A0092B-C50C-407E-A947-70E740481C1C}">
+                <a14:useLocalDpi xmlns:a14="http://schemas.microsoft.com/office/drawing/2010/main" val="0"/>
+              </a:ext>
+            </a:extLst>
+          </a:blip>
+          <a:stretch>
+            <a:fillRect/>
+          </a:stretch>
+        </p:blipFill>
+        <p:spPr>
+          <a:xfrm>
+            <a:off x="28317515" y="8571931"/>
+            <a:ext cx="6251184" cy="5304196"/>
+          </a:xfrm>
+          <a:prstGeom prst="rect">
+            <a:avLst/>
+          </a:prstGeom>
+        </p:spPr>
+      </p:pic>
+      <p:pic>
+        <p:nvPicPr>
+          <p:cNvPr id="12" name="Picture 11">
+            <a:extLst>
+              <a:ext uri="{FF2B5EF4-FFF2-40B4-BE49-F238E27FC236}">
+                <a16:creationId xmlns:a16="http://schemas.microsoft.com/office/drawing/2014/main" id="{1915266C-AC1D-4D50-BFA1-AA2FC1166E14}"/>
+              </a:ext>
+            </a:extLst>
+          </p:cNvPr>
+          <p:cNvPicPr>
+            <a:picLocks noChangeAspect="1"/>
+          </p:cNvPicPr>
+          <p:nvPr/>
+        </p:nvPicPr>
+        <p:blipFill>
           <a:blip r:embed="rId6">
             <a:extLst>
               <a:ext uri="{28A0092B-C50C-407E-A947-70E740481C1C}">
@@ -3824,8 +3840,8 @@
         </p:blipFill>
         <p:spPr>
           <a:xfrm>
-            <a:off x="28317515" y="8571931"/>
-            <a:ext cx="6251184" cy="5304196"/>
+            <a:off x="34589511" y="8504375"/>
+            <a:ext cx="9065713" cy="6126480"/>
           </a:xfrm>
           <a:prstGeom prst="rect">
             <a:avLst/>
@@ -3834,10 +3850,10 @@
       </p:pic>
       <p:pic>
         <p:nvPicPr>
-          <p:cNvPr id="12" name="Picture 11">
+          <p:cNvPr id="11" name="Picture 10">
             <a:extLst>
               <a:ext uri="{FF2B5EF4-FFF2-40B4-BE49-F238E27FC236}">
-                <a16:creationId xmlns:a16="http://schemas.microsoft.com/office/drawing/2014/main" id="{1915266C-AC1D-4D50-BFA1-AA2FC1166E14}"/>
+                <a16:creationId xmlns:a16="http://schemas.microsoft.com/office/drawing/2014/main" id="{583E313C-4C31-450D-B8D0-97BDBDF4A101}"/>
               </a:ext>
             </a:extLst>
           </p:cNvPr>
@@ -3860,8 +3876,8 @@
         </p:blipFill>
         <p:spPr>
           <a:xfrm>
-            <a:off x="34589511" y="8504375"/>
-            <a:ext cx="9065713" cy="6126480"/>
+            <a:off x="28556633" y="14674442"/>
+            <a:ext cx="13756308" cy="6613613"/>
           </a:xfrm>
           <a:prstGeom prst="rect">
             <a:avLst/>
@@ -3870,10 +3886,10 @@
       </p:pic>
       <p:pic>
         <p:nvPicPr>
-          <p:cNvPr id="11" name="Picture 10">
+          <p:cNvPr id="14" name="Picture 13">
             <a:extLst>
               <a:ext uri="{FF2B5EF4-FFF2-40B4-BE49-F238E27FC236}">
-                <a16:creationId xmlns:a16="http://schemas.microsoft.com/office/drawing/2014/main" id="{583E313C-4C31-450D-B8D0-97BDBDF4A101}"/>
+                <a16:creationId xmlns:a16="http://schemas.microsoft.com/office/drawing/2014/main" id="{3D9D2431-F235-48C5-A7DE-5A6C539BAF06}"/>
               </a:ext>
             </a:extLst>
           </p:cNvPr>
@@ -3896,8 +3912,8 @@
         </p:blipFill>
         <p:spPr>
           <a:xfrm>
-            <a:off x="28556633" y="14674442"/>
-            <a:ext cx="13756308" cy="6613613"/>
+            <a:off x="28556632" y="21487190"/>
+            <a:ext cx="13756303" cy="6613613"/>
           </a:xfrm>
           <a:prstGeom prst="rect">
             <a:avLst/>
@@ -3906,10 +3922,10 @@
       </p:pic>
       <p:pic>
         <p:nvPicPr>
-          <p:cNvPr id="14" name="Picture 13">
+          <p:cNvPr id="3" name="Picture 2">
             <a:extLst>
               <a:ext uri="{FF2B5EF4-FFF2-40B4-BE49-F238E27FC236}">
-                <a16:creationId xmlns:a16="http://schemas.microsoft.com/office/drawing/2014/main" id="{3D9D2431-F235-48C5-A7DE-5A6C539BAF06}"/>
+                <a16:creationId xmlns:a16="http://schemas.microsoft.com/office/drawing/2014/main" id="{E009C615-5800-469A-B503-4A802122AC02}"/>
               </a:ext>
             </a:extLst>
           </p:cNvPr>
@@ -3932,8 +3948,8 @@
         </p:blipFill>
         <p:spPr>
           <a:xfrm>
-            <a:off x="28556632" y="21487190"/>
-            <a:ext cx="13756303" cy="6613613"/>
+            <a:off x="1126098" y="16476855"/>
+            <a:ext cx="7307511" cy="7393608"/>
           </a:xfrm>
           <a:prstGeom prst="rect">
             <a:avLst/>
